--- a/защита.pptx
+++ b/защита.pptx
@@ -216,7 +216,7 @@
           <a:p>
             <a:fld id="{CA7E6C0B-20AF-4B54-AD47-5C01CBBC4192}" type="datetimeFigureOut">
               <a:rPr lang="ru-RU" smtClean="0"/>
-              <a:t>02.05.2026</a:t>
+              <a:t>04.05.2026</a:t>
             </a:fld>
             <a:endParaRPr lang="ru-RU" dirty="0"/>
           </a:p>
@@ -1002,7 +1002,7 @@
           <a:p>
             <a:fld id="{7773020F-D5E0-48FD-B85A-4CC78F2B9551}" type="datetimeFigureOut">
               <a:rPr lang="ru-RU" smtClean="0"/>
-              <a:t>02.05.2026</a:t>
+              <a:t>04.05.2026</a:t>
             </a:fld>
             <a:endParaRPr lang="ru-RU" dirty="0"/>
           </a:p>
@@ -1168,7 +1168,7 @@
           <a:p>
             <a:fld id="{7773020F-D5E0-48FD-B85A-4CC78F2B9551}" type="datetimeFigureOut">
               <a:rPr lang="ru-RU" smtClean="0"/>
-              <a:t>02.05.2026</a:t>
+              <a:t>04.05.2026</a:t>
             </a:fld>
             <a:endParaRPr lang="ru-RU" dirty="0"/>
           </a:p>
@@ -1344,7 +1344,7 @@
           <a:p>
             <a:fld id="{7773020F-D5E0-48FD-B85A-4CC78F2B9551}" type="datetimeFigureOut">
               <a:rPr lang="ru-RU" smtClean="0"/>
-              <a:t>02.05.2026</a:t>
+              <a:t>04.05.2026</a:t>
             </a:fld>
             <a:endParaRPr lang="ru-RU" dirty="0"/>
           </a:p>
@@ -1510,7 +1510,7 @@
           <a:p>
             <a:fld id="{7773020F-D5E0-48FD-B85A-4CC78F2B9551}" type="datetimeFigureOut">
               <a:rPr lang="ru-RU" smtClean="0"/>
-              <a:t>02.05.2026</a:t>
+              <a:t>04.05.2026</a:t>
             </a:fld>
             <a:endParaRPr lang="ru-RU" dirty="0"/>
           </a:p>
@@ -1753,7 +1753,7 @@
           <a:p>
             <a:fld id="{7773020F-D5E0-48FD-B85A-4CC78F2B9551}" type="datetimeFigureOut">
               <a:rPr lang="ru-RU" smtClean="0"/>
-              <a:t>02.05.2026</a:t>
+              <a:t>04.05.2026</a:t>
             </a:fld>
             <a:endParaRPr lang="ru-RU" dirty="0"/>
           </a:p>
@@ -1980,7 +1980,7 @@
           <a:p>
             <a:fld id="{7773020F-D5E0-48FD-B85A-4CC78F2B9551}" type="datetimeFigureOut">
               <a:rPr lang="ru-RU" smtClean="0"/>
-              <a:t>02.05.2026</a:t>
+              <a:t>04.05.2026</a:t>
             </a:fld>
             <a:endParaRPr lang="ru-RU" dirty="0"/>
           </a:p>
@@ -2342,7 +2342,7 @@
           <a:p>
             <a:fld id="{7773020F-D5E0-48FD-B85A-4CC78F2B9551}" type="datetimeFigureOut">
               <a:rPr lang="ru-RU" smtClean="0"/>
-              <a:t>02.05.2026</a:t>
+              <a:t>04.05.2026</a:t>
             </a:fld>
             <a:endParaRPr lang="ru-RU" dirty="0"/>
           </a:p>
@@ -2457,7 +2457,7 @@
           <a:p>
             <a:fld id="{7773020F-D5E0-48FD-B85A-4CC78F2B9551}" type="datetimeFigureOut">
               <a:rPr lang="ru-RU" smtClean="0"/>
-              <a:t>02.05.2026</a:t>
+              <a:t>04.05.2026</a:t>
             </a:fld>
             <a:endParaRPr lang="ru-RU" dirty="0"/>
           </a:p>
@@ -2550,7 +2550,7 @@
           <a:p>
             <a:fld id="{7773020F-D5E0-48FD-B85A-4CC78F2B9551}" type="datetimeFigureOut">
               <a:rPr lang="ru-RU" smtClean="0"/>
-              <a:t>02.05.2026</a:t>
+              <a:t>04.05.2026</a:t>
             </a:fld>
             <a:endParaRPr lang="ru-RU" dirty="0"/>
           </a:p>
@@ -2823,7 +2823,7 @@
           <a:p>
             <a:fld id="{7773020F-D5E0-48FD-B85A-4CC78F2B9551}" type="datetimeFigureOut">
               <a:rPr lang="ru-RU" smtClean="0"/>
-              <a:t>02.05.2026</a:t>
+              <a:t>04.05.2026</a:t>
             </a:fld>
             <a:endParaRPr lang="ru-RU" dirty="0"/>
           </a:p>
@@ -3073,7 +3073,7 @@
           <a:p>
             <a:fld id="{7773020F-D5E0-48FD-B85A-4CC78F2B9551}" type="datetimeFigureOut">
               <a:rPr lang="ru-RU" smtClean="0"/>
-              <a:t>02.05.2026</a:t>
+              <a:t>04.05.2026</a:t>
             </a:fld>
             <a:endParaRPr lang="ru-RU" dirty="0"/>
           </a:p>
@@ -3282,7 +3282,7 @@
           <a:p>
             <a:fld id="{7773020F-D5E0-48FD-B85A-4CC78F2B9551}" type="datetimeFigureOut">
               <a:rPr lang="ru-RU" smtClean="0"/>
-              <a:t>02.05.2026</a:t>
+              <a:t>04.05.2026</a:t>
             </a:fld>
             <a:endParaRPr lang="ru-RU" dirty="0"/>
           </a:p>
@@ -4360,7 +4360,7 @@
                 <a:ea typeface="+mj-ea"/>
                 <a:cs typeface="Times New Roman" panose="02020603050405020304" pitchFamily="18" charset="0"/>
               </a:rPr>
-              <a:t>Клиентская часть:</a:t>
+              <a:t>Серверная часть:</a:t>
             </a:r>
           </a:p>
         </p:txBody>
@@ -4799,7 +4799,7 @@
                 </a:solidFill>
                 <a:latin typeface="+mn-lt"/>
               </a:rPr>
-              <a:t>Взаимодейтсвие клиент-сервер</a:t>
+              <a:t>Взаимодействие клиент-сервер</a:t>
             </a:r>
             <a:endParaRPr lang="ru-RU" sz="3200" dirty="0">
               <a:latin typeface="Times New Roman" panose="02020603050405020304" pitchFamily="18" charset="0"/>
